--- a/deck/01-problem-framing.pptx
+++ b/deck/01-problem-framing.pptx
@@ -3452,7 +3452,7 @@
                 </a:solidFill>
                 <a:latin typeface="Calibri"/>
               </a:rPr>
-              <a:t> claimed annual benefit, </a:t>
+              <a:t> promised vs a </a:t>
             </a:r>
             <a:r>
               <a:rPr sz="1250" b="1">
@@ -3461,7 +3461,7 @@
                 </a:solidFill>
                 <a:latin typeface="Calibri"/>
               </a:rPr>
-              <a:t>~$0.5k</a:t>
+              <a:t>$39.6m</a:t>
             </a:r>
             <a:r>
               <a:rPr sz="1250" b="0">
@@ -3470,7 +3470,16 @@
                 </a:solidFill>
                 <a:latin typeface="Calibri"/>
               </a:rPr>
-              <a:t> banked</a:t>
+              <a:t> run-rate scheduled by end-2027 — </a:t>
+            </a:r>
+            <a:r>
+              <a:rPr sz="1250" b="1">
+                <a:solidFill>
+                  <a:srgbClr val="16283C"/>
+                </a:solidFill>
+                <a:latin typeface="Calibri"/>
+              </a:rPr>
+              <a:t>47%</a:t>
             </a:r>
           </a:p>
           <a:p>
